--- a/frontend/public/copil_test.pptx
+++ b/frontend/public/copil_test.pptx
@@ -3199,7 +3199,7 @@
                 </a:solidFill>
                 <a:latin typeface="Arial"/>
               </a:rPr>
-              <a:t>COPIL Mensuel Avril 2025 — Portefeuille Projets</a:t>
+              <a:t>COPIL Mensuel Avril 2025</a:t>
             </a:r>
           </a:p>
         </p:txBody>
@@ -4276,7 +4276,7 @@
                           </a:solidFill>
                           <a:latin typeface="Arial"/>
                         </a:rPr>
-                        <a:t>50</a:t>
+                        <a:t>4 550</a:t>
                       </a:r>
                     </a:p>
                   </a:txBody>
@@ -4295,17 +4295,17 @@
                       <a:r>
                         <a:rPr sz="800" b="0">
                           <a:solidFill>
-                            <a:srgbClr val="10B981"/>
-                          </a:solidFill>
-                          <a:latin typeface="Arial"/>
-                        </a:rPr>
-                        <a:t>-4 150 K€</a:t>
-                      </a:r>
-                    </a:p>
-                  </a:txBody>
-                  <a:tcPr marL="54864" marR="36576" marT="18288">
-                    <a:solidFill>
-                      <a:srgbClr val="F0FDF4"/>
+                            <a:srgbClr val="EF4444"/>
+                          </a:solidFill>
+                          <a:latin typeface="Arial"/>
+                        </a:rPr>
+                        <a:t>+350 K€</a:t>
+                      </a:r>
+                    </a:p>
+                  </a:txBody>
+                  <a:tcPr marL="54864" marR="36576" marT="18288">
+                    <a:solidFill>
+                      <a:srgbClr val="FEF2F2"/>
                     </a:solidFill>
                   </a:tcPr>
                 </a:tc>
@@ -4762,7 +4762,7 @@
                 </a:solidFill>
                 <a:latin typeface="Arial"/>
               </a:rPr>
-              <a:t>COPIL Mensuel Avril 2025 — Portefeuille Projets  ·  24/04/2025  ·  Projetenne Confidentiel</a:t>
+              <a:t>COPIL Mensuel Avril 2025  ·  24/04/2025  ·  Projetenne Confidentiel</a:t>
             </a:r>
           </a:p>
         </p:txBody>
@@ -5985,7 +5985,7 @@
                 </a:solidFill>
                 <a:latin typeface="Arial"/>
               </a:rPr>
-              <a:t>COPIL Mensuel Avril 2025 — Portefeuille Projets  ·  24/04/2025  ·  Projetenne Confidentiel</a:t>
+              <a:t>COPIL Mensuel Avril 2025  ·  24/04/2025  ·  Projetenne Confidentiel</a:t>
             </a:r>
           </a:p>
         </p:txBody>
@@ -8207,7 +8207,7 @@
                 </a:solidFill>
                 <a:latin typeface="Arial"/>
               </a:rPr>
-              <a:t>COPIL Mensuel Avril 2025 — Portefeuille Projets  ·  24/04/2025  ·  Projetenne Confidentiel</a:t>
+              <a:t>COPIL Mensuel Avril 2025  ·  24/04/2025  ·  Projetenne Confidentiel</a:t>
             </a:r>
           </a:p>
         </p:txBody>
@@ -9921,7 +9921,7 @@
                 </a:solidFill>
                 <a:latin typeface="Arial"/>
               </a:rPr>
-              <a:t>COPIL Mensuel Avril 2025 — Portefeuille Projets  ·  24/04/2025  ·  Projetenne Confidentiel</a:t>
+              <a:t>COPIL Mensuel Avril 2025  ·  24/04/2025  ·  Projetenne Confidentiel</a:t>
             </a:r>
           </a:p>
         </p:txBody>
@@ -10491,11 +10491,11 @@
                       <a:r>
                         <a:rPr sz="850" b="1">
                           <a:solidFill>
-                            <a:srgbClr val="10B981"/>
-                          </a:solidFill>
-                          <a:latin typeface="Arial"/>
-                        </a:rPr>
-                        <a:t>50 K€</a:t>
+                            <a:srgbClr val="EF4444"/>
+                          </a:solidFill>
+                          <a:latin typeface="Arial"/>
+                        </a:rPr>
+                        <a:t>4 550 K€</a:t>
                       </a:r>
                     </a:p>
                   </a:txBody>
@@ -10525,7 +10525,7 @@
                   </a:txBody>
                   <a:tcPr marL="73152" marT="36576">
                     <a:solidFill>
-                      <a:srgbClr val="F0FDF4"/>
+                      <a:srgbClr val="FEF2F2"/>
                     </a:solidFill>
                   </a:tcPr>
                 </a:tc>
@@ -10537,17 +10537,17 @@
                       <a:r>
                         <a:rPr sz="850" b="1">
                           <a:solidFill>
-                            <a:srgbClr val="10B981"/>
-                          </a:solidFill>
-                          <a:latin typeface="Arial"/>
-                        </a:rPr>
-                        <a:t>-4 150 K€  (-98.8%)</a:t>
+                            <a:srgbClr val="EF4444"/>
+                          </a:solidFill>
+                          <a:latin typeface="Arial"/>
+                        </a:rPr>
+                        <a:t>+350 K€  (+8.3%)</a:t>
                       </a:r>
                     </a:p>
                   </a:txBody>
                   <a:tcPr marL="73152" marT="36576">
                     <a:solidFill>
-                      <a:srgbClr val="F0FDF4"/>
+                      <a:srgbClr val="FEF2F2"/>
                     </a:solidFill>
                   </a:tcPr>
                 </a:tc>
@@ -12387,7 +12387,7 @@
                 </a:solidFill>
                 <a:latin typeface="Arial"/>
               </a:rPr>
-              <a:t>COPIL Mensuel Avril 2025 — Portefeuille Projets  ·  24/04/2025  ·  Projetenne Confidentiel</a:t>
+              <a:t>COPIL Mensuel Avril 2025  ·  24/04/2025  ·  Projetenne Confidentiel</a:t>
             </a:r>
           </a:p>
         </p:txBody>
@@ -14853,7 +14853,7 @@
                 </a:solidFill>
                 <a:latin typeface="Arial"/>
               </a:rPr>
-              <a:t>COPIL Mensuel Avril 2025 — Portefeuille Projets  ·  24/04/2025  ·  Projetenne Confidentiel</a:t>
+              <a:t>COPIL Mensuel Avril 2025  ·  24/04/2025  ·  Projetenne Confidentiel</a:t>
             </a:r>
           </a:p>
         </p:txBody>
@@ -17319,7 +17319,7 @@
                 </a:solidFill>
                 <a:latin typeface="Arial"/>
               </a:rPr>
-              <a:t>COPIL Mensuel Avril 2025 — Portefeuille Projets  ·  24/04/2025  ·  Projetenne Confidentiel</a:t>
+              <a:t>COPIL Mensuel Avril 2025  ·  24/04/2025  ·  Projetenne Confidentiel</a:t>
             </a:r>
           </a:p>
         </p:txBody>
